--- a/docs/meeting/2026_02_19.pptx
+++ b/docs/meeting/2026_02_19.pptx
@@ -5,7 +5,7 @@
     <p:sldMasterId id="2147483648" r:id="rId1"/>
   </p:sldMasterIdLst>
   <p:notesMasterIdLst>
-    <p:notesMasterId r:id="rId10"/>
+    <p:notesMasterId r:id="rId11"/>
   </p:notesMasterIdLst>
   <p:sldIdLst>
     <p:sldId id="1574" r:id="rId2"/>
@@ -14,8 +14,9 @@
     <p:sldId id="1577" r:id="rId5"/>
     <p:sldId id="1582" r:id="rId6"/>
     <p:sldId id="1583" r:id="rId7"/>
-    <p:sldId id="1575" r:id="rId8"/>
-    <p:sldId id="1576" r:id="rId9"/>
+    <p:sldId id="1628" r:id="rId8"/>
+    <p:sldId id="1575" r:id="rId9"/>
+    <p:sldId id="1576" r:id="rId10"/>
   </p:sldIdLst>
   <p:sldSz cx="12192000" cy="6858000"/>
   <p:notesSz cx="6858000" cy="9144000"/>
@@ -125,6 +126,7 @@
             <p14:sldId id="1577"/>
             <p14:sldId id="1582"/>
             <p14:sldId id="1583"/>
+            <p14:sldId id="1628"/>
             <p14:sldId id="1575"/>
             <p14:sldId id="1576"/>
           </p14:sldIdLst>
@@ -1397,14 +1399,12 @@
         <a:blipFill>
           <a:blip xmlns:r="http://schemas.openxmlformats.org/officeDocument/2006/relationships" r:embed="rId1">
             <a:extLst>
-              <a:ext uri="{28A0092B-C50C-407E-A947-70E740481C1C}">
-                <a14:useLocalDpi xmlns:a14="http://schemas.microsoft.com/office/drawing/2010/main" val="0"/>
-              </a:ext>
               <a:ext uri="{96DAC541-7B7A-43D3-8B79-37D633B846F1}">
                 <asvg:svgBlip xmlns:asvg="http://schemas.microsoft.com/office/drawing/2016/SVG/main" r:embed="rId2"/>
               </a:ext>
             </a:extLst>
           </a:blip>
+          <a:srcRect/>
           <a:stretch>
             <a:fillRect/>
           </a:stretch>
@@ -1415,7 +1415,7 @@
       </dgm:spPr>
       <dgm:extLst>
         <a:ext uri="{E40237B7-FDA0-4F09-8148-C483321AD2D9}">
-          <dgm14:cNvPr xmlns:dgm14="http://schemas.microsoft.com/office/drawing/2010/diagram" id="0" name="" descr="User Network"/>
+          <dgm14:cNvPr xmlns:dgm14="http://schemas.microsoft.com/office/drawing/2010/diagram" id="0" name="" descr="Scientific Thought with solid fill"/>
         </a:ext>
       </dgm:extLst>
     </dgm:pt>
@@ -1450,14 +1450,12 @@
         <a:blipFill>
           <a:blip xmlns:r="http://schemas.openxmlformats.org/officeDocument/2006/relationships" r:embed="rId3">
             <a:extLst>
-              <a:ext uri="{28A0092B-C50C-407E-A947-70E740481C1C}">
-                <a14:useLocalDpi xmlns:a14="http://schemas.microsoft.com/office/drawing/2010/main" val="0"/>
-              </a:ext>
               <a:ext uri="{96DAC541-7B7A-43D3-8B79-37D633B846F1}">
                 <asvg:svgBlip xmlns:asvg="http://schemas.microsoft.com/office/drawing/2016/SVG/main" r:embed="rId4"/>
               </a:ext>
             </a:extLst>
           </a:blip>
+          <a:srcRect/>
           <a:stretch>
             <a:fillRect/>
           </a:stretch>
@@ -1468,7 +1466,7 @@
       </dgm:spPr>
       <dgm:extLst>
         <a:ext uri="{E40237B7-FDA0-4F09-8148-C483321AD2D9}">
-          <dgm14:cNvPr xmlns:dgm14="http://schemas.microsoft.com/office/drawing/2010/diagram" id="0" name="" descr="Calculator"/>
+          <dgm14:cNvPr xmlns:dgm14="http://schemas.microsoft.com/office/drawing/2010/diagram" id="0" name="" descr="User network with solid fill"/>
         </a:ext>
       </dgm:extLst>
     </dgm:pt>
@@ -1503,14 +1501,12 @@
         <a:blipFill>
           <a:blip xmlns:r="http://schemas.openxmlformats.org/officeDocument/2006/relationships" r:embed="rId5">
             <a:extLst>
-              <a:ext uri="{28A0092B-C50C-407E-A947-70E740481C1C}">
-                <a14:useLocalDpi xmlns:a14="http://schemas.microsoft.com/office/drawing/2010/main" val="0"/>
-              </a:ext>
               <a:ext uri="{96DAC541-7B7A-43D3-8B79-37D633B846F1}">
                 <asvg:svgBlip xmlns:asvg="http://schemas.microsoft.com/office/drawing/2016/SVG/main" r:embed="rId6"/>
               </a:ext>
             </a:extLst>
           </a:blip>
+          <a:srcRect/>
           <a:stretch>
             <a:fillRect/>
           </a:stretch>
@@ -1521,7 +1517,7 @@
       </dgm:spPr>
       <dgm:extLst>
         <a:ext uri="{E40237B7-FDA0-4F09-8148-C483321AD2D9}">
-          <dgm14:cNvPr xmlns:dgm14="http://schemas.microsoft.com/office/drawing/2010/diagram" id="0" name="" descr="Venn Diagram"/>
+          <dgm14:cNvPr xmlns:dgm14="http://schemas.microsoft.com/office/drawing/2010/diagram" id="0" name="" descr="Calculator with solid fill"/>
         </a:ext>
       </dgm:extLst>
     </dgm:pt>
@@ -1641,14 +1637,12 @@
         <a:blipFill>
           <a:blip xmlns:r="http://schemas.openxmlformats.org/officeDocument/2006/relationships" r:embed="rId1">
             <a:extLst>
-              <a:ext uri="{28A0092B-C50C-407E-A947-70E740481C1C}">
-                <a14:useLocalDpi xmlns:a14="http://schemas.microsoft.com/office/drawing/2010/main" val="0"/>
-              </a:ext>
               <a:ext uri="{96DAC541-7B7A-43D3-8B79-37D633B846F1}">
                 <asvg:svgBlip xmlns:asvg="http://schemas.microsoft.com/office/drawing/2016/SVG/main" r:embed="rId2"/>
               </a:ext>
             </a:extLst>
           </a:blip>
+          <a:srcRect/>
           <a:stretch>
             <a:fillRect/>
           </a:stretch>
@@ -1818,14 +1812,12 @@
         <a:blipFill>
           <a:blip xmlns:r="http://schemas.openxmlformats.org/officeDocument/2006/relationships" r:embed="rId3">
             <a:extLst>
-              <a:ext uri="{28A0092B-C50C-407E-A947-70E740481C1C}">
-                <a14:useLocalDpi xmlns:a14="http://schemas.microsoft.com/office/drawing/2010/main" val="0"/>
-              </a:ext>
               <a:ext uri="{96DAC541-7B7A-43D3-8B79-37D633B846F1}">
                 <asvg:svgBlip xmlns:asvg="http://schemas.microsoft.com/office/drawing/2016/SVG/main" r:embed="rId4"/>
               </a:ext>
             </a:extLst>
           </a:blip>
+          <a:srcRect/>
           <a:stretch>
             <a:fillRect/>
           </a:stretch>
@@ -1987,14 +1979,12 @@
         <a:blipFill>
           <a:blip xmlns:r="http://schemas.openxmlformats.org/officeDocument/2006/relationships" r:embed="rId5">
             <a:extLst>
-              <a:ext uri="{28A0092B-C50C-407E-A947-70E740481C1C}">
-                <a14:useLocalDpi xmlns:a14="http://schemas.microsoft.com/office/drawing/2010/main" val="0"/>
-              </a:ext>
               <a:ext uri="{96DAC541-7B7A-43D3-8B79-37D633B846F1}">
                 <asvg:svgBlip xmlns:asvg="http://schemas.microsoft.com/office/drawing/2016/SVG/main" r:embed="rId6"/>
               </a:ext>
             </a:extLst>
           </a:blip>
+          <a:srcRect/>
           <a:stretch>
             <a:fillRect/>
           </a:stretch>
@@ -3504,7 +3494,7 @@
           <a:p>
             <a:fld id="{2915196C-CDBC-4DEE-A220-849C85FC22AC}" type="datetimeFigureOut">
               <a:rPr lang="he-IL" smtClean="0"/>
-              <a:t>ב'/אדר/תשפ"ו</a:t>
+              <a:t>ה'/אדר/תשפ"ו</a:t>
             </a:fld>
             <a:endParaRPr lang="he-IL"/>
           </a:p>
@@ -3958,7 +3948,7 @@
           <a:p>
             <a:fld id="{FC6B3A86-AB79-4388-8CA5-9FC4B834779B}" type="datetime8">
               <a:rPr lang="he-IL" smtClean="0"/>
-              <a:t>19 פברואר 26</a:t>
+              <a:t>22 פברואר 26</a:t>
             </a:fld>
             <a:endParaRPr lang="he-IL"/>
           </a:p>
@@ -4181,7 +4171,7 @@
           <a:p>
             <a:fld id="{18F56BC8-8E7D-4896-9980-77BC87FB8E3E}" type="datetime8">
               <a:rPr lang="he-IL" smtClean="0"/>
-              <a:t>19 פברואר 26</a:t>
+              <a:t>22 פברואר 26</a:t>
             </a:fld>
             <a:endParaRPr lang="he-IL"/>
           </a:p>
@@ -4414,7 +4404,7 @@
           <a:p>
             <a:fld id="{0FE327C8-CB36-417E-834B-544633ADCE63}" type="datetime8">
               <a:rPr lang="he-IL" smtClean="0"/>
-              <a:t>19 פברואר 26</a:t>
+              <a:t>22 פברואר 26</a:t>
             </a:fld>
             <a:endParaRPr lang="he-IL"/>
           </a:p>
@@ -4532,7 +4522,7 @@
           <a:p>
             <a:fld id="{8E065D1C-C98B-44F5-AB2A-FEE3E85D0A94}" type="datetime8">
               <a:rPr lang="he-IL" smtClean="0"/>
-              <a:t>19 פברואר 26</a:t>
+              <a:t>22 פברואר 26</a:t>
             </a:fld>
             <a:endParaRPr lang="he-IL"/>
           </a:p>
@@ -4843,7 +4833,7 @@
           <a:p>
             <a:fld id="{7634CBFB-2532-48BA-BAE2-ADD925390740}" type="datetime8">
               <a:rPr lang="he-IL" smtClean="0"/>
-              <a:t>19 פברואר 26</a:t>
+              <a:t>22 פברואר 26</a:t>
             </a:fld>
             <a:endParaRPr lang="he-IL"/>
           </a:p>
@@ -5126,7 +5116,7 @@
           <a:p>
             <a:fld id="{8EAC1FDD-37C4-4A6B-BF31-779943CE32CF}" type="datetime8">
               <a:rPr lang="he-IL" smtClean="0"/>
-              <a:t>19 פברואר 26</a:t>
+              <a:t>22 פברואר 26</a:t>
             </a:fld>
             <a:endParaRPr lang="he-IL"/>
           </a:p>
@@ -5439,7 +5429,7 @@
           <a:p>
             <a:fld id="{C73C226C-A76A-4927-8F1D-1BD4AC033ABB}" type="datetime8">
               <a:rPr lang="he-IL" smtClean="0"/>
-              <a:t>19 פברואר 26</a:t>
+              <a:t>22 פברואר 26</a:t>
             </a:fld>
             <a:endParaRPr lang="he-IL"/>
           </a:p>
@@ -5942,7 +5932,7 @@
           <a:p>
             <a:fld id="{430DF2BF-D428-43E9-B36B-6DD16CF93579}" type="datetime8">
               <a:rPr lang="he-IL" smtClean="0"/>
-              <a:t>19 פברואר 26</a:t>
+              <a:t>22 פברואר 26</a:t>
             </a:fld>
             <a:endParaRPr lang="he-IL"/>
           </a:p>
@@ -6089,7 +6079,7 @@
           <a:p>
             <a:fld id="{390A9136-4922-4C74-B05C-12CD0951E601}" type="datetime8">
               <a:rPr lang="he-IL" smtClean="0"/>
-              <a:t>19 פברואר 26</a:t>
+              <a:t>22 פברואר 26</a:t>
             </a:fld>
             <a:endParaRPr lang="he-IL"/>
           </a:p>
@@ -6207,7 +6197,7 @@
           <a:p>
             <a:fld id="{C29F3CA8-2E63-412C-AA06-0D760EBE5965}" type="datetime8">
               <a:rPr lang="he-IL" smtClean="0"/>
-              <a:t>19 פברואר 26</a:t>
+              <a:t>22 פברואר 26</a:t>
             </a:fld>
             <a:endParaRPr lang="he-IL"/>
           </a:p>
@@ -6529,7 +6519,7 @@
           <a:p>
             <a:fld id="{7AC7B867-AA4A-4FF3-AD8B-0AD0F18EE595}" type="datetime8">
               <a:rPr lang="he-IL" smtClean="0"/>
-              <a:t>19 פברואר 26</a:t>
+              <a:t>22 פברואר 26</a:t>
             </a:fld>
             <a:endParaRPr lang="he-IL"/>
           </a:p>
@@ -6827,7 +6817,7 @@
           <a:p>
             <a:fld id="{F5E9EBD3-88E8-46DB-BD3B-F935B7013014}" type="datetime8">
               <a:rPr lang="he-IL" smtClean="0"/>
-              <a:t>19 פברואר 26</a:t>
+              <a:t>22 פברואר 26</a:t>
             </a:fld>
             <a:endParaRPr lang="he-IL"/>
           </a:p>
@@ -7111,7 +7101,7 @@
           <a:p>
             <a:fld id="{8E065D1C-C98B-44F5-AB2A-FEE3E85D0A94}" type="datetime8">
               <a:rPr lang="he-IL" smtClean="0"/>
-              <a:t>19 פברואר 26</a:t>
+              <a:t>22 פברואר 26</a:t>
             </a:fld>
             <a:endParaRPr lang="he-IL"/>
           </a:p>
@@ -8348,7 +8338,7 @@
             <p:ph idx="1"/>
             <p:extLst>
               <p:ext uri="{D42A27DB-BD31-4B8C-83A1-F6EECF244321}">
-                <p14:modId xmlns:p14="http://schemas.microsoft.com/office/powerpoint/2010/main" val="1207765470"/>
+                <p14:modId xmlns:p14="http://schemas.microsoft.com/office/powerpoint/2010/main" val="91776922"/>
               </p:ext>
             </p:extLst>
           </p:nvPr>
@@ -8948,13 +8938,21 @@
           <a:p>
             <a:r>
               <a:rPr lang="en-GB" b="1" dirty="0"/>
-              <a:t>Boost author:</a:t>
+              <a:t>Boost author: </a:t>
+            </a:r>
+            <a:r>
+              <a:rPr lang="en-GB" dirty="0"/>
+              <a:t>An author whose activity is followed by a significant increase in discussion activity.</a:t>
             </a:r>
           </a:p>
           <a:p>
             <a:r>
               <a:rPr lang="en-GB" b="1" dirty="0"/>
-              <a:t>Author`s Boost Score:</a:t>
+              <a:t>Author`s Boost Score: </a:t>
+            </a:r>
+            <a:r>
+              <a:rPr lang="en-GB" dirty="0"/>
+              <a:t>A quantitative measure calculated as the cumulative burst weights associated with a user's activity, based on discussion volume increases occurring shortly after the user posts or contributes.</a:t>
             </a:r>
           </a:p>
           <a:p>
@@ -9026,6 +9024,240 @@
           <p:cNvPr id="2" name="Title 1">
             <a:extLst>
               <a:ext uri="{FF2B5EF4-FFF2-40B4-BE49-F238E27FC236}">
+                <a16:creationId xmlns:a16="http://schemas.microsoft.com/office/drawing/2014/main" id="{E180CF04-DED3-2E08-8761-891A60FEF6EA}"/>
+              </a:ext>
+            </a:extLst>
+          </p:cNvPr>
+          <p:cNvSpPr>
+            <a:spLocks noGrp="1"/>
+          </p:cNvSpPr>
+          <p:nvPr>
+            <p:ph type="title"/>
+          </p:nvPr>
+        </p:nvSpPr>
+        <p:spPr/>
+        <p:txBody>
+          <a:bodyPr/>
+          <a:lstStyle/>
+          <a:p>
+            <a:r>
+              <a:rPr lang="en-US" dirty="0"/>
+              <a:t>Indicators</a:t>
+            </a:r>
+            <a:endParaRPr lang="en-IL" dirty="0"/>
+          </a:p>
+        </p:txBody>
+      </p:sp>
+      <p:sp>
+        <p:nvSpPr>
+          <p:cNvPr id="3" name="Content Placeholder 2">
+            <a:extLst>
+              <a:ext uri="{FF2B5EF4-FFF2-40B4-BE49-F238E27FC236}">
+                <a16:creationId xmlns:a16="http://schemas.microsoft.com/office/drawing/2014/main" id="{61818744-AA3F-0C94-68C3-B98E69E97B93}"/>
+              </a:ext>
+            </a:extLst>
+          </p:cNvPr>
+          <p:cNvSpPr>
+            <a:spLocks noGrp="1"/>
+          </p:cNvSpPr>
+          <p:nvPr>
+            <p:ph idx="1"/>
+          </p:nvPr>
+        </p:nvSpPr>
+        <p:spPr>
+          <a:xfrm>
+            <a:off x="1243087" y="1825624"/>
+            <a:ext cx="10582656" cy="4879976"/>
+          </a:xfrm>
+        </p:spPr>
+        <p:txBody>
+          <a:bodyPr>
+            <a:normAutofit fontScale="92500" lnSpcReduction="10000"/>
+          </a:bodyPr>
+          <a:lstStyle/>
+          <a:p>
+            <a:r>
+              <a:rPr lang="en-GB" b="1" dirty="0" err="1"/>
+              <a:t>Tfidf</a:t>
+            </a:r>
+            <a:r>
+              <a:rPr lang="en-GB" b="1" dirty="0"/>
+              <a:t> sum: </a:t>
+            </a:r>
+            <a:r>
+              <a:rPr lang="en-GB" dirty="0"/>
+              <a:t>The sum of the all the per-topic </a:t>
+            </a:r>
+            <a:r>
+              <a:rPr lang="en-GB" dirty="0" err="1"/>
+              <a:t>tdidf</a:t>
+            </a:r>
+            <a:r>
+              <a:rPr lang="en-GB" dirty="0"/>
+              <a:t> score. How much the author is a leading participant in the topics.</a:t>
+            </a:r>
+          </a:p>
+          <a:p>
+            <a:r>
+              <a:rPr lang="en-GB" b="1" dirty="0"/>
+              <a:t>K-core: </a:t>
+            </a:r>
+            <a:r>
+              <a:rPr lang="en-GB" dirty="0"/>
+              <a:t>Indicates how deeply embedded a user is within the dense group.</a:t>
+            </a:r>
+          </a:p>
+          <a:p>
+            <a:r>
+              <a:rPr lang="en-GB" b="1" dirty="0" err="1"/>
+              <a:t>Pagerank</a:t>
+            </a:r>
+            <a:r>
+              <a:rPr lang="en-GB" b="1" dirty="0"/>
+              <a:t>: </a:t>
+            </a:r>
+            <a:r>
+              <a:rPr lang="en-GB" dirty="0"/>
+              <a:t>Estimates a user’s overall importance based on how many important users connect to them.</a:t>
+            </a:r>
+          </a:p>
+          <a:p>
+            <a:r>
+              <a:rPr lang="en-GB" b="1" dirty="0"/>
+              <a:t>Clustering: </a:t>
+            </a:r>
+            <a:r>
+              <a:rPr lang="en-GB" dirty="0"/>
+              <a:t>Measures how tightly connected a user’s </a:t>
+            </a:r>
+            <a:r>
+              <a:rPr lang="en-GB" dirty="0" err="1"/>
+              <a:t>neighbors</a:t>
+            </a:r>
+            <a:r>
+              <a:rPr lang="en-GB" dirty="0"/>
+              <a:t> are to each other.</a:t>
+            </a:r>
+          </a:p>
+          <a:p>
+            <a:r>
+              <a:rPr lang="en-GB" b="1" dirty="0"/>
+              <a:t>Square clustering: </a:t>
+            </a:r>
+            <a:r>
+              <a:rPr lang="en-GB" dirty="0"/>
+              <a:t>Measures how often a user participates in tightly connected small group structures.</a:t>
+            </a:r>
+          </a:p>
+          <a:p>
+            <a:r>
+              <a:rPr lang="en-GB" b="1" dirty="0"/>
+              <a:t>Degree centrality: </a:t>
+            </a:r>
+            <a:r>
+              <a:rPr lang="en-GB" dirty="0"/>
+              <a:t>Counts how many direct connections a user has.</a:t>
+            </a:r>
+          </a:p>
+          <a:p>
+            <a:r>
+              <a:rPr lang="en-GB" b="1" dirty="0"/>
+              <a:t>Eigenvector centrality: </a:t>
+            </a:r>
+            <a:r>
+              <a:rPr lang="en-GB" dirty="0"/>
+              <a:t>Shows whether a user is connected to other high-scoring users.</a:t>
+            </a:r>
+          </a:p>
+          <a:p>
+            <a:r>
+              <a:rPr lang="en-GB" b="1" dirty="0"/>
+              <a:t>Harmonic centrality: </a:t>
+            </a:r>
+            <a:r>
+              <a:rPr lang="en-GB" dirty="0"/>
+              <a:t>Reflects how easily a user can reach many others in the network.</a:t>
+            </a:r>
+          </a:p>
+          <a:p>
+            <a:r>
+              <a:rPr lang="en-GB" b="1" dirty="0"/>
+              <a:t>Betweenness centrality: </a:t>
+            </a:r>
+            <a:r>
+              <a:rPr lang="en-GB" dirty="0"/>
+              <a:t>measures how frequently a node appears on the shortest path between other,</a:t>
+            </a:r>
+          </a:p>
+          <a:p>
+            <a:endParaRPr lang="en-IL" dirty="0"/>
+          </a:p>
+        </p:txBody>
+      </p:sp>
+      <p:sp>
+        <p:nvSpPr>
+          <p:cNvPr id="4" name="Slide Number Placeholder 3">
+            <a:extLst>
+              <a:ext uri="{FF2B5EF4-FFF2-40B4-BE49-F238E27FC236}">
+                <a16:creationId xmlns:a16="http://schemas.microsoft.com/office/drawing/2014/main" id="{B369E058-D5C2-C2B9-04B1-D7B341490D5D}"/>
+              </a:ext>
+            </a:extLst>
+          </p:cNvPr>
+          <p:cNvSpPr>
+            <a:spLocks noGrp="1"/>
+          </p:cNvSpPr>
+          <p:nvPr>
+            <p:ph type="sldNum" sz="quarter" idx="12"/>
+          </p:nvPr>
+        </p:nvSpPr>
+        <p:spPr/>
+        <p:txBody>
+          <a:bodyPr/>
+          <a:lstStyle/>
+          <a:p>
+            <a:fld id="{E6AB8EDD-9EF2-4633-A1C2-4D908C1019B4}" type="slidenum">
+              <a:rPr lang="he-IL" smtClean="0"/>
+              <a:t>7</a:t>
+            </a:fld>
+            <a:endParaRPr lang="he-IL"/>
+          </a:p>
+        </p:txBody>
+      </p:sp>
+    </p:spTree>
+    <p:extLst>
+      <p:ext uri="{BB962C8B-B14F-4D97-AF65-F5344CB8AC3E}">
+        <p14:creationId xmlns:p14="http://schemas.microsoft.com/office/powerpoint/2010/main" val="3277267947"/>
+      </p:ext>
+    </p:extLst>
+  </p:cSld>
+  <p:clrMapOvr>
+    <a:masterClrMapping/>
+  </p:clrMapOvr>
+</p:sld>
+</file>
+
+<file path=ppt/slides/slide8.xml><?xml version="1.0" encoding="utf-8"?>
+<p:sld xmlns:a="http://schemas.openxmlformats.org/drawingml/2006/main" xmlns:r="http://schemas.openxmlformats.org/officeDocument/2006/relationships" xmlns:p="http://schemas.openxmlformats.org/presentationml/2006/main">
+  <p:cSld>
+    <p:spTree>
+      <p:nvGrpSpPr>
+        <p:cNvPr id="1" name=""/>
+        <p:cNvGrpSpPr/>
+        <p:nvPr/>
+      </p:nvGrpSpPr>
+      <p:grpSpPr>
+        <a:xfrm>
+          <a:off x="0" y="0"/>
+          <a:ext cx="0" cy="0"/>
+          <a:chOff x="0" y="0"/>
+          <a:chExt cx="0" cy="0"/>
+        </a:xfrm>
+      </p:grpSpPr>
+      <p:sp>
+        <p:nvSpPr>
+          <p:cNvPr id="2" name="Title 1">
+            <a:extLst>
+              <a:ext uri="{FF2B5EF4-FFF2-40B4-BE49-F238E27FC236}">
                 <a16:creationId xmlns:a16="http://schemas.microsoft.com/office/drawing/2014/main" id="{B10B01E5-E339-0213-69E4-B75795308BCF}"/>
               </a:ext>
             </a:extLst>
@@ -9111,7 +9343,7 @@
           <a:p>
             <a:fld id="{E6AB8EDD-9EF2-4633-A1C2-4D908C1019B4}" type="slidenum">
               <a:rPr lang="he-IL" smtClean="0"/>
-              <a:t>7</a:t>
+              <a:t>8</a:t>
             </a:fld>
             <a:endParaRPr lang="he-IL"/>
           </a:p>
@@ -9166,7 +9398,7 @@
 </p:sld>
 </file>
 
-<file path=ppt/slides/slide8.xml><?xml version="1.0" encoding="utf-8"?>
+<file path=ppt/slides/slide9.xml><?xml version="1.0" encoding="utf-8"?>
 <p:sld xmlns:a="http://schemas.openxmlformats.org/drawingml/2006/main" xmlns:r="http://schemas.openxmlformats.org/officeDocument/2006/relationships" xmlns:p="http://schemas.openxmlformats.org/presentationml/2006/main">
   <p:cSld>
     <p:spTree>
@@ -9241,7 +9473,7 @@
           <a:p>
             <a:fld id="{E6AB8EDD-9EF2-4633-A1C2-4D908C1019B4}" type="slidenum">
               <a:rPr lang="he-IL" smtClean="0"/>
-              <a:t>8</a:t>
+              <a:t>9</a:t>
             </a:fld>
             <a:endParaRPr lang="he-IL"/>
           </a:p>
